--- a/docs/Slides/14.6/cot_hijacking_poc_progress.pptx
+++ b/docs/Slides/14.6/cot_hijacking_poc_progress.pptx
@@ -3604,14 +3604,14 @@
       </p:sp>
       <p:sp>
         <p:nvSpPr>
-          <p:cNvPr id="7" name="Text 5"/>
-          <p:cNvSpPr/>
-          <p:nvPr/>
-        </p:nvSpPr>
-        <p:spPr>
-          <a:xfrm>
-            <a:off x="685800" y="1216152"/>
-            <a:ext cx="1051560" cy="354330"/>
+          <p:cNvPr id="8" name="Text 6"/>
+          <p:cNvSpPr/>
+          <p:nvPr/>
+        </p:nvSpPr>
+        <p:spPr>
+          <a:xfrm>
+            <a:off x="685800" y="1231765"/>
+            <a:ext cx="2331720" cy="354330"/>
           </a:xfrm>
           <a:prstGeom prst="rect">
             <a:avLst/>
@@ -3643,7 +3643,7 @@
                 <a:ea typeface="Aptos" pitchFamily="34" charset="-122"/>
                 <a:cs typeface="Aptos" pitchFamily="34" charset="-120"/>
               </a:rPr>
-              <a:t>Job</a:t>
+              <a:t>Cost function</a:t>
             </a:r>
             <a:endParaRPr lang="en-US" sz="1000" dirty="0"/>
           </a:p>
@@ -3651,14 +3651,14 @@
       </p:sp>
       <p:sp>
         <p:nvSpPr>
-          <p:cNvPr id="8" name="Text 6"/>
-          <p:cNvSpPr/>
-          <p:nvPr/>
-        </p:nvSpPr>
-        <p:spPr>
-          <a:xfrm>
-            <a:off x="1737360" y="1216152"/>
-            <a:ext cx="2331720" cy="354330"/>
+          <p:cNvPr id="9" name="Text 7"/>
+          <p:cNvSpPr/>
+          <p:nvPr/>
+        </p:nvSpPr>
+        <p:spPr>
+          <a:xfrm>
+            <a:off x="3017520" y="1231765"/>
+            <a:ext cx="1234440" cy="354330"/>
           </a:xfrm>
           <a:prstGeom prst="rect">
             <a:avLst/>
@@ -3690,7 +3690,7 @@
                 <a:ea typeface="Aptos" pitchFamily="34" charset="-122"/>
                 <a:cs typeface="Aptos" pitchFamily="34" charset="-120"/>
               </a:rPr>
-              <a:t>Cost function</a:t>
+              <a:t>Episodes</a:t>
             </a:r>
             <a:endParaRPr lang="en-US" sz="1000" dirty="0"/>
           </a:p>
@@ -3698,14 +3698,14 @@
       </p:sp>
       <p:sp>
         <p:nvSpPr>
-          <p:cNvPr id="9" name="Text 7"/>
-          <p:cNvSpPr/>
-          <p:nvPr/>
-        </p:nvSpPr>
-        <p:spPr>
-          <a:xfrm>
-            <a:off x="4069080" y="1216152"/>
-            <a:ext cx="1234440" cy="354330"/>
+          <p:cNvPr id="10" name="Text 8"/>
+          <p:cNvSpPr/>
+          <p:nvPr/>
+        </p:nvSpPr>
+        <p:spPr>
+          <a:xfrm>
+            <a:off x="4251960" y="1231765"/>
+            <a:ext cx="2057400" cy="354330"/>
           </a:xfrm>
           <a:prstGeom prst="rect">
             <a:avLst/>
@@ -3737,7 +3737,7 @@
                 <a:ea typeface="Aptos" pitchFamily="34" charset="-122"/>
                 <a:cs typeface="Aptos" pitchFamily="34" charset="-120"/>
               </a:rPr>
-              <a:t>Episodes</a:t>
+              <a:t>Overall ASR</a:t>
             </a:r>
             <a:endParaRPr lang="en-US" sz="1000" dirty="0"/>
           </a:p>
@@ -3745,14 +3745,14 @@
       </p:sp>
       <p:sp>
         <p:nvSpPr>
-          <p:cNvPr id="10" name="Text 8"/>
-          <p:cNvSpPr/>
-          <p:nvPr/>
-        </p:nvSpPr>
-        <p:spPr>
-          <a:xfrm>
-            <a:off x="5303520" y="1216152"/>
-            <a:ext cx="2057400" cy="354330"/>
+          <p:cNvPr id="11" name="Text 9"/>
+          <p:cNvSpPr/>
+          <p:nvPr/>
+        </p:nvSpPr>
+        <p:spPr>
+          <a:xfrm>
+            <a:off x="6309360" y="1231765"/>
+            <a:ext cx="2148840" cy="354330"/>
           </a:xfrm>
           <a:prstGeom prst="rect">
             <a:avLst/>
@@ -3784,7 +3784,7 @@
                 <a:ea typeface="Aptos" pitchFamily="34" charset="-122"/>
                 <a:cs typeface="Aptos" pitchFamily="34" charset="-120"/>
               </a:rPr>
-              <a:t>Overall ASR</a:t>
+              <a:t>Condition A ASR</a:t>
             </a:r>
             <a:endParaRPr lang="en-US" sz="1000" dirty="0"/>
           </a:p>
@@ -3792,108 +3792,14 @@
       </p:sp>
       <p:sp>
         <p:nvSpPr>
-          <p:cNvPr id="11" name="Text 9"/>
-          <p:cNvSpPr/>
-          <p:nvPr/>
-        </p:nvSpPr>
-        <p:spPr>
-          <a:xfrm>
-            <a:off x="7360920" y="1216152"/>
-            <a:ext cx="2148840" cy="354330"/>
-          </a:xfrm>
-          <a:prstGeom prst="rect">
-            <a:avLst/>
-          </a:prstGeom>
-          <a:solidFill>
-            <a:srgbClr val="F3F4F6"/>
-          </a:solidFill>
-          <a:ln w="5080">
-            <a:solidFill>
-              <a:srgbClr val="E5E7EB"/>
-            </a:solidFill>
-          </a:ln>
-        </p:spPr>
-        <p:txBody>
-          <a:bodyPr wrap="square" lIns="508" tIns="508" rIns="508" bIns="508" rtlCol="0" anchor="ctr">
-            <a:normAutofit/>
-          </a:bodyPr>
-          <a:lstStyle/>
-          <a:p>
-            <a:pPr marL="0" indent="0">
-              <a:buNone/>
-            </a:pPr>
-            <a:r>
-              <a:rPr lang="en-US" sz="1000" b="1" dirty="0">
-                <a:solidFill>
-                  <a:srgbClr val="111827"/>
-                </a:solidFill>
-                <a:latin typeface="Aptos" pitchFamily="34" charset="0"/>
-                <a:ea typeface="Aptos" pitchFamily="34" charset="-122"/>
-                <a:cs typeface="Aptos" pitchFamily="34" charset="-120"/>
-              </a:rPr>
-              <a:t>Condition A ASR</a:t>
-            </a:r>
-            <a:endParaRPr lang="en-US" sz="1000" dirty="0"/>
-          </a:p>
-        </p:txBody>
-      </p:sp>
-      <p:sp>
-        <p:nvSpPr>
-          <p:cNvPr id="12" name="Text 10"/>
-          <p:cNvSpPr/>
-          <p:nvPr/>
-        </p:nvSpPr>
-        <p:spPr>
-          <a:xfrm>
-            <a:off x="9509760" y="1216152"/>
-            <a:ext cx="2194560" cy="354330"/>
-          </a:xfrm>
-          <a:prstGeom prst="rect">
-            <a:avLst/>
-          </a:prstGeom>
-          <a:solidFill>
-            <a:srgbClr val="F3F4F6"/>
-          </a:solidFill>
-          <a:ln w="5080">
-            <a:solidFill>
-              <a:srgbClr val="E5E7EB"/>
-            </a:solidFill>
-          </a:ln>
-        </p:spPr>
-        <p:txBody>
-          <a:bodyPr wrap="square" lIns="508" tIns="508" rIns="508" bIns="508" rtlCol="0" anchor="ctr">
-            <a:normAutofit/>
-          </a:bodyPr>
-          <a:lstStyle/>
-          <a:p>
-            <a:pPr marL="0" indent="0">
-              <a:buNone/>
-            </a:pPr>
-            <a:r>
-              <a:rPr lang="en-US" sz="1000" b="1" dirty="0">
-                <a:solidFill>
-                  <a:srgbClr val="111827"/>
-                </a:solidFill>
-                <a:latin typeface="Aptos" pitchFamily="34" charset="0"/>
-                <a:ea typeface="Aptos" pitchFamily="34" charset="-122"/>
-                <a:cs typeface="Aptos" pitchFamily="34" charset="-120"/>
-              </a:rPr>
-              <a:t>Status</a:t>
-            </a:r>
-            <a:endParaRPr lang="en-US" sz="1000" dirty="0"/>
-          </a:p>
-        </p:txBody>
-      </p:sp>
-      <p:sp>
-        <p:nvSpPr>
-          <p:cNvPr id="13" name="Text 11"/>
-          <p:cNvSpPr/>
-          <p:nvPr/>
-        </p:nvSpPr>
-        <p:spPr>
-          <a:xfrm>
-            <a:off x="685800" y="1570482"/>
-            <a:ext cx="1051560" cy="354330"/>
+          <p:cNvPr id="14" name="Text 12"/>
+          <p:cNvSpPr/>
+          <p:nvPr/>
+        </p:nvSpPr>
+        <p:spPr>
+          <a:xfrm>
+            <a:off x="685800" y="1586095"/>
+            <a:ext cx="2331720" cy="354330"/>
           </a:xfrm>
           <a:prstGeom prst="rect">
             <a:avLst/>
@@ -3925,7 +3831,7 @@
                 <a:ea typeface="Aptos" pitchFamily="34" charset="-122"/>
                 <a:cs typeface="Aptos" pitchFamily="34" charset="-120"/>
               </a:rPr>
-              <a:t>539190</a:t>
+              <a:t>cost_mechanistic</a:t>
             </a:r>
             <a:endParaRPr lang="en-US" sz="1000" dirty="0"/>
           </a:p>
@@ -3933,14 +3839,14 @@
       </p:sp>
       <p:sp>
         <p:nvSpPr>
-          <p:cNvPr id="14" name="Text 12"/>
-          <p:cNvSpPr/>
-          <p:nvPr/>
-        </p:nvSpPr>
-        <p:spPr>
-          <a:xfrm>
-            <a:off x="1737360" y="1570482"/>
-            <a:ext cx="2331720" cy="354330"/>
+          <p:cNvPr id="15" name="Text 13"/>
+          <p:cNvSpPr/>
+          <p:nvPr/>
+        </p:nvSpPr>
+        <p:spPr>
+          <a:xfrm>
+            <a:off x="3017520" y="1586095"/>
+            <a:ext cx="1234440" cy="354330"/>
           </a:xfrm>
           <a:prstGeom prst="rect">
             <a:avLst/>
@@ -3972,7 +3878,7 @@
                 <a:ea typeface="Aptos" pitchFamily="34" charset="-122"/>
                 <a:cs typeface="Aptos" pitchFamily="34" charset="-120"/>
               </a:rPr>
-              <a:t>cost_mechanistic</a:t>
+              <a:t>43/48</a:t>
             </a:r>
             <a:endParaRPr lang="en-US" sz="1000" dirty="0"/>
           </a:p>
@@ -3980,14 +3886,14 @@
       </p:sp>
       <p:sp>
         <p:nvSpPr>
-          <p:cNvPr id="15" name="Text 13"/>
-          <p:cNvSpPr/>
-          <p:nvPr/>
-        </p:nvSpPr>
-        <p:spPr>
-          <a:xfrm>
-            <a:off x="4069080" y="1570482"/>
-            <a:ext cx="1234440" cy="354330"/>
+          <p:cNvPr id="16" name="Text 14"/>
+          <p:cNvSpPr/>
+          <p:nvPr/>
+        </p:nvSpPr>
+        <p:spPr>
+          <a:xfrm>
+            <a:off x="4251960" y="1586095"/>
+            <a:ext cx="2057400" cy="354330"/>
           </a:xfrm>
           <a:prstGeom prst="rect">
             <a:avLst/>
@@ -4019,7 +3925,7 @@
                 <a:ea typeface="Aptos" pitchFamily="34" charset="-122"/>
                 <a:cs typeface="Aptos" pitchFamily="34" charset="-120"/>
               </a:rPr>
-              <a:t>43/48</a:t>
+              <a:t>48.8% (21/43)</a:t>
             </a:r>
             <a:endParaRPr lang="en-US" sz="1000" dirty="0"/>
           </a:p>
@@ -4027,14 +3933,14 @@
       </p:sp>
       <p:sp>
         <p:nvSpPr>
-          <p:cNvPr id="16" name="Text 14"/>
-          <p:cNvSpPr/>
-          <p:nvPr/>
-        </p:nvSpPr>
-        <p:spPr>
-          <a:xfrm>
-            <a:off x="5303520" y="1570482"/>
-            <a:ext cx="2057400" cy="354330"/>
+          <p:cNvPr id="17" name="Text 15"/>
+          <p:cNvSpPr/>
+          <p:nvPr/>
+        </p:nvSpPr>
+        <p:spPr>
+          <a:xfrm>
+            <a:off x="6309360" y="1586095"/>
+            <a:ext cx="2148840" cy="354330"/>
           </a:xfrm>
           <a:prstGeom prst="rect">
             <a:avLst/>
@@ -4066,7 +3972,7 @@
                 <a:ea typeface="Aptos" pitchFamily="34" charset="-122"/>
                 <a:cs typeface="Aptos" pitchFamily="34" charset="-120"/>
               </a:rPr>
-              <a:t>48.8% (21/43)</a:t>
+              <a:t>71% (10/14)</a:t>
             </a:r>
             <a:endParaRPr lang="en-US" sz="1000" dirty="0"/>
           </a:p>
@@ -4074,14 +3980,14 @@
       </p:sp>
       <p:sp>
         <p:nvSpPr>
-          <p:cNvPr id="17" name="Text 15"/>
-          <p:cNvSpPr/>
-          <p:nvPr/>
-        </p:nvSpPr>
-        <p:spPr>
-          <a:xfrm>
-            <a:off x="7360920" y="1570482"/>
-            <a:ext cx="2148840" cy="354330"/>
+          <p:cNvPr id="20" name="Text 18"/>
+          <p:cNvSpPr/>
+          <p:nvPr/>
+        </p:nvSpPr>
+        <p:spPr>
+          <a:xfrm>
+            <a:off x="685800" y="1940425"/>
+            <a:ext cx="2331720" cy="354330"/>
           </a:xfrm>
           <a:prstGeom prst="rect">
             <a:avLst/>
@@ -4113,7 +4019,7 @@
                 <a:ea typeface="Aptos" pitchFamily="34" charset="-122"/>
                 <a:cs typeface="Aptos" pitchFamily="34" charset="-120"/>
               </a:rPr>
-              <a:t>71% (10/14)</a:t>
+              <a:t>cost_l22_deflect</a:t>
             </a:r>
             <a:endParaRPr lang="en-US" sz="1000" dirty="0"/>
           </a:p>
@@ -4121,14 +4027,14 @@
       </p:sp>
       <p:sp>
         <p:nvSpPr>
-          <p:cNvPr id="18" name="Text 16"/>
-          <p:cNvSpPr/>
-          <p:nvPr/>
-        </p:nvSpPr>
-        <p:spPr>
-          <a:xfrm>
-            <a:off x="9509760" y="1570482"/>
-            <a:ext cx="2194560" cy="354330"/>
+          <p:cNvPr id="21" name="Text 19"/>
+          <p:cNvSpPr/>
+          <p:nvPr/>
+        </p:nvSpPr>
+        <p:spPr>
+          <a:xfrm>
+            <a:off x="3017520" y="1940425"/>
+            <a:ext cx="1234440" cy="354330"/>
           </a:xfrm>
           <a:prstGeom prst="rect">
             <a:avLst/>
@@ -4160,7 +4066,7 @@
                 <a:ea typeface="Aptos" pitchFamily="34" charset="-122"/>
                 <a:cs typeface="Aptos" pitchFamily="34" charset="-120"/>
               </a:rPr>
-              <a:t>Complete</a:t>
+              <a:t>44/48</a:t>
             </a:r>
             <a:endParaRPr lang="en-US" sz="1000" dirty="0"/>
           </a:p>
@@ -4168,14 +4074,14 @@
       </p:sp>
       <p:sp>
         <p:nvSpPr>
-          <p:cNvPr id="19" name="Text 17"/>
-          <p:cNvSpPr/>
-          <p:nvPr/>
-        </p:nvSpPr>
-        <p:spPr>
-          <a:xfrm>
-            <a:off x="685800" y="1924812"/>
-            <a:ext cx="1051560" cy="354330"/>
+          <p:cNvPr id="22" name="Text 20"/>
+          <p:cNvSpPr/>
+          <p:nvPr/>
+        </p:nvSpPr>
+        <p:spPr>
+          <a:xfrm>
+            <a:off x="4251960" y="1940425"/>
+            <a:ext cx="2057400" cy="354330"/>
           </a:xfrm>
           <a:prstGeom prst="rect">
             <a:avLst/>
@@ -4207,7 +4113,7 @@
                 <a:ea typeface="Aptos" pitchFamily="34" charset="-122"/>
                 <a:cs typeface="Aptos" pitchFamily="34" charset="-120"/>
               </a:rPr>
-              <a:t>540506</a:t>
+              <a:t>45.5% (20/44)</a:t>
             </a:r>
             <a:endParaRPr lang="en-US" sz="1000" dirty="0"/>
           </a:p>
@@ -4215,14 +4121,14 @@
       </p:sp>
       <p:sp>
         <p:nvSpPr>
-          <p:cNvPr id="20" name="Text 18"/>
-          <p:cNvSpPr/>
-          <p:nvPr/>
-        </p:nvSpPr>
-        <p:spPr>
-          <a:xfrm>
-            <a:off x="1737360" y="1924812"/>
-            <a:ext cx="2331720" cy="354330"/>
+          <p:cNvPr id="23" name="Text 21"/>
+          <p:cNvSpPr/>
+          <p:nvPr/>
+        </p:nvSpPr>
+        <p:spPr>
+          <a:xfrm>
+            <a:off x="6309360" y="1940425"/>
+            <a:ext cx="2148840" cy="354330"/>
           </a:xfrm>
           <a:prstGeom prst="rect">
             <a:avLst/>
@@ -4254,7 +4160,7 @@
                 <a:ea typeface="Aptos" pitchFamily="34" charset="-122"/>
                 <a:cs typeface="Aptos" pitchFamily="34" charset="-120"/>
               </a:rPr>
-              <a:t>cost_l22_deflect</a:t>
+              <a:t>71% (10/14)</a:t>
             </a:r>
             <a:endParaRPr lang="en-US" sz="1000" dirty="0"/>
           </a:p>
@@ -4262,14 +4168,14 @@
       </p:sp>
       <p:sp>
         <p:nvSpPr>
-          <p:cNvPr id="21" name="Text 19"/>
-          <p:cNvSpPr/>
-          <p:nvPr/>
-        </p:nvSpPr>
-        <p:spPr>
-          <a:xfrm>
-            <a:off x="4069080" y="1924812"/>
-            <a:ext cx="1234440" cy="354330"/>
+          <p:cNvPr id="26" name="Text 24"/>
+          <p:cNvSpPr/>
+          <p:nvPr/>
+        </p:nvSpPr>
+        <p:spPr>
+          <a:xfrm>
+            <a:off x="685800" y="2294755"/>
+            <a:ext cx="2331720" cy="354330"/>
           </a:xfrm>
           <a:prstGeom prst="rect">
             <a:avLst/>
@@ -4301,7 +4207,7 @@
                 <a:ea typeface="Aptos" pitchFamily="34" charset="-122"/>
                 <a:cs typeface="Aptos" pitchFamily="34" charset="-120"/>
               </a:rPr>
-              <a:t>44/48</a:t>
+              <a:t>cost_asr</a:t>
             </a:r>
             <a:endParaRPr lang="en-US" sz="1000" dirty="0"/>
           </a:p>
@@ -4309,14 +4215,14 @@
       </p:sp>
       <p:sp>
         <p:nvSpPr>
-          <p:cNvPr id="22" name="Text 20"/>
-          <p:cNvSpPr/>
-          <p:nvPr/>
-        </p:nvSpPr>
-        <p:spPr>
-          <a:xfrm>
-            <a:off x="5303520" y="1924812"/>
-            <a:ext cx="2057400" cy="354330"/>
+          <p:cNvPr id="27" name="Text 25"/>
+          <p:cNvSpPr/>
+          <p:nvPr/>
+        </p:nvSpPr>
+        <p:spPr>
+          <a:xfrm>
+            <a:off x="3017520" y="2294755"/>
+            <a:ext cx="1234440" cy="354330"/>
           </a:xfrm>
           <a:prstGeom prst="rect">
             <a:avLst/>
@@ -4336,9 +4242,6 @@
           </a:bodyPr>
           <a:lstStyle/>
           <a:p>
-            <a:pPr marL="0" indent="0">
-              <a:buNone/>
-            </a:pPr>
             <a:r>
               <a:rPr lang="en-US" sz="1000" dirty="0">
                 <a:solidFill>
@@ -4348,7 +4251,7 @@
                 <a:ea typeface="Aptos" pitchFamily="34" charset="-122"/>
                 <a:cs typeface="Aptos" pitchFamily="34" charset="-120"/>
               </a:rPr>
-              <a:t>45.5% (20/44)</a:t>
+              <a:t>44/48</a:t>
             </a:r>
             <a:endParaRPr lang="en-US" sz="1000" dirty="0"/>
           </a:p>
@@ -4356,14 +4259,14 @@
       </p:sp>
       <p:sp>
         <p:nvSpPr>
-          <p:cNvPr id="23" name="Text 21"/>
-          <p:cNvSpPr/>
-          <p:nvPr/>
-        </p:nvSpPr>
-        <p:spPr>
-          <a:xfrm>
-            <a:off x="7360920" y="1924812"/>
-            <a:ext cx="2148840" cy="354330"/>
+          <p:cNvPr id="28" name="Text 26"/>
+          <p:cNvSpPr/>
+          <p:nvPr/>
+        </p:nvSpPr>
+        <p:spPr>
+          <a:xfrm>
+            <a:off x="4251960" y="2294755"/>
+            <a:ext cx="2057400" cy="354330"/>
           </a:xfrm>
           <a:prstGeom prst="rect">
             <a:avLst/>
@@ -4395,7 +4298,7 @@
                 <a:ea typeface="Aptos" pitchFamily="34" charset="-122"/>
                 <a:cs typeface="Aptos" pitchFamily="34" charset="-120"/>
               </a:rPr>
-              <a:t>71% (10/14)</a:t>
+              <a:t>[fill]</a:t>
             </a:r>
             <a:endParaRPr lang="en-US" sz="1000" dirty="0"/>
           </a:p>
@@ -4403,14 +4306,14 @@
       </p:sp>
       <p:sp>
         <p:nvSpPr>
-          <p:cNvPr id="24" name="Text 22"/>
-          <p:cNvSpPr/>
-          <p:nvPr/>
-        </p:nvSpPr>
-        <p:spPr>
-          <a:xfrm>
-            <a:off x="9509760" y="1924812"/>
-            <a:ext cx="2194560" cy="354330"/>
+          <p:cNvPr id="29" name="Text 27"/>
+          <p:cNvSpPr/>
+          <p:nvPr/>
+        </p:nvSpPr>
+        <p:spPr>
+          <a:xfrm>
+            <a:off x="6309360" y="2294755"/>
+            <a:ext cx="2148840" cy="354330"/>
           </a:xfrm>
           <a:prstGeom prst="rect">
             <a:avLst/>
@@ -4430,9 +4333,6 @@
           </a:bodyPr>
           <a:lstStyle/>
           <a:p>
-            <a:pPr marL="0" indent="0">
-              <a:buNone/>
-            </a:pPr>
             <a:r>
               <a:rPr lang="en-US" sz="1000" dirty="0">
                 <a:solidFill>
@@ -4442,330 +4342,7 @@
                 <a:ea typeface="Aptos" pitchFamily="34" charset="-122"/>
                 <a:cs typeface="Aptos" pitchFamily="34" charset="-120"/>
               </a:rPr>
-              <a:t>Complete</a:t>
-            </a:r>
-            <a:endParaRPr lang="en-US" sz="1000" dirty="0"/>
-          </a:p>
-        </p:txBody>
-      </p:sp>
-      <p:sp>
-        <p:nvSpPr>
-          <p:cNvPr id="25" name="Text 23"/>
-          <p:cNvSpPr/>
-          <p:nvPr/>
-        </p:nvSpPr>
-        <p:spPr>
-          <a:xfrm>
-            <a:off x="685800" y="2279142"/>
-            <a:ext cx="1051560" cy="354330"/>
-          </a:xfrm>
-          <a:prstGeom prst="rect">
-            <a:avLst/>
-          </a:prstGeom>
-          <a:solidFill>
-            <a:srgbClr val="FFFFFF"/>
-          </a:solidFill>
-          <a:ln w="5080">
-            <a:solidFill>
-              <a:srgbClr val="E5E7EB"/>
-            </a:solidFill>
-          </a:ln>
-        </p:spPr>
-        <p:txBody>
-          <a:bodyPr wrap="square" lIns="508" tIns="508" rIns="508" bIns="508" rtlCol="0" anchor="ctr">
-            <a:normAutofit/>
-          </a:bodyPr>
-          <a:lstStyle/>
-          <a:p>
-            <a:pPr marL="0" indent="0">
-              <a:buNone/>
-            </a:pPr>
-            <a:r>
-              <a:rPr lang="en-US" sz="1000" dirty="0">
-                <a:solidFill>
-                  <a:srgbClr val="111827"/>
-                </a:solidFill>
-                <a:latin typeface="Aptos" pitchFamily="34" charset="0"/>
-                <a:ea typeface="Aptos" pitchFamily="34" charset="-122"/>
-                <a:cs typeface="Aptos" pitchFamily="34" charset="-120"/>
-              </a:rPr>
-              <a:t>541183</a:t>
-            </a:r>
-            <a:endParaRPr lang="en-US" sz="1000" dirty="0"/>
-          </a:p>
-        </p:txBody>
-      </p:sp>
-      <p:sp>
-        <p:nvSpPr>
-          <p:cNvPr id="26" name="Text 24"/>
-          <p:cNvSpPr/>
-          <p:nvPr/>
-        </p:nvSpPr>
-        <p:spPr>
-          <a:xfrm>
-            <a:off x="1737360" y="2279142"/>
-            <a:ext cx="2331720" cy="354330"/>
-          </a:xfrm>
-          <a:prstGeom prst="rect">
-            <a:avLst/>
-          </a:prstGeom>
-          <a:solidFill>
-            <a:srgbClr val="FFFFFF"/>
-          </a:solidFill>
-          <a:ln w="5080">
-            <a:solidFill>
-              <a:srgbClr val="E5E7EB"/>
-            </a:solidFill>
-          </a:ln>
-        </p:spPr>
-        <p:txBody>
-          <a:bodyPr wrap="square" lIns="508" tIns="508" rIns="508" bIns="508" rtlCol="0" anchor="ctr">
-            <a:normAutofit/>
-          </a:bodyPr>
-          <a:lstStyle/>
-          <a:p>
-            <a:pPr marL="0" indent="0">
-              <a:buNone/>
-            </a:pPr>
-            <a:r>
-              <a:rPr lang="en-US" sz="1000" dirty="0">
-                <a:solidFill>
-                  <a:srgbClr val="111827"/>
-                </a:solidFill>
-                <a:latin typeface="Aptos" pitchFamily="34" charset="0"/>
-                <a:ea typeface="Aptos" pitchFamily="34" charset="-122"/>
-                <a:cs typeface="Aptos" pitchFamily="34" charset="-120"/>
-              </a:rPr>
-              <a:t>cost_asr</a:t>
-            </a:r>
-            <a:endParaRPr lang="en-US" sz="1000" dirty="0"/>
-          </a:p>
-        </p:txBody>
-      </p:sp>
-      <p:sp>
-        <p:nvSpPr>
-          <p:cNvPr id="27" name="Text 25"/>
-          <p:cNvSpPr/>
-          <p:nvPr/>
-        </p:nvSpPr>
-        <p:spPr>
-          <a:xfrm>
-            <a:off x="4069080" y="2279142"/>
-            <a:ext cx="1234440" cy="354330"/>
-          </a:xfrm>
-          <a:prstGeom prst="rect">
-            <a:avLst/>
-          </a:prstGeom>
-          <a:solidFill>
-            <a:srgbClr val="FFFFFF"/>
-          </a:solidFill>
-          <a:ln w="5080">
-            <a:solidFill>
-              <a:srgbClr val="E5E7EB"/>
-            </a:solidFill>
-          </a:ln>
-        </p:spPr>
-        <p:txBody>
-          <a:bodyPr wrap="square" lIns="508" tIns="508" rIns="508" bIns="508" rtlCol="0" anchor="ctr">
-            <a:normAutofit/>
-          </a:bodyPr>
-          <a:lstStyle/>
-          <a:p>
-            <a:pPr marL="0" indent="0">
-              <a:buNone/>
-            </a:pPr>
-            <a:r>
-              <a:rPr lang="en-US" sz="1000" dirty="0">
-                <a:solidFill>
-                  <a:srgbClr val="111827"/>
-                </a:solidFill>
-                <a:latin typeface="Aptos" pitchFamily="34" charset="0"/>
-                <a:ea typeface="Aptos" pitchFamily="34" charset="-122"/>
-                <a:cs typeface="Aptos" pitchFamily="34" charset="-120"/>
-              </a:rPr>
-              <a:t>[fill]</a:t>
-            </a:r>
-            <a:endParaRPr lang="en-US" sz="1000" dirty="0"/>
-          </a:p>
-        </p:txBody>
-      </p:sp>
-      <p:sp>
-        <p:nvSpPr>
-          <p:cNvPr id="28" name="Text 26"/>
-          <p:cNvSpPr/>
-          <p:nvPr/>
-        </p:nvSpPr>
-        <p:spPr>
-          <a:xfrm>
-            <a:off x="5303520" y="2279142"/>
-            <a:ext cx="2057400" cy="354330"/>
-          </a:xfrm>
-          <a:prstGeom prst="rect">
-            <a:avLst/>
-          </a:prstGeom>
-          <a:solidFill>
-            <a:srgbClr val="FFFFFF"/>
-          </a:solidFill>
-          <a:ln w="5080">
-            <a:solidFill>
-              <a:srgbClr val="E5E7EB"/>
-            </a:solidFill>
-          </a:ln>
-        </p:spPr>
-        <p:txBody>
-          <a:bodyPr wrap="square" lIns="508" tIns="508" rIns="508" bIns="508" rtlCol="0" anchor="ctr">
-            <a:normAutofit/>
-          </a:bodyPr>
-          <a:lstStyle/>
-          <a:p>
-            <a:pPr marL="0" indent="0">
-              <a:buNone/>
-            </a:pPr>
-            <a:r>
-              <a:rPr lang="en-US" sz="1000" dirty="0">
-                <a:solidFill>
-                  <a:srgbClr val="111827"/>
-                </a:solidFill>
-                <a:latin typeface="Aptos" pitchFamily="34" charset="0"/>
-                <a:ea typeface="Aptos" pitchFamily="34" charset="-122"/>
-                <a:cs typeface="Aptos" pitchFamily="34" charset="-120"/>
-              </a:rPr>
-              <a:t>[fill]</a:t>
-            </a:r>
-            <a:endParaRPr lang="en-US" sz="1000" dirty="0"/>
-          </a:p>
-        </p:txBody>
-      </p:sp>
-      <p:sp>
-        <p:nvSpPr>
-          <p:cNvPr id="29" name="Text 27"/>
-          <p:cNvSpPr/>
-          <p:nvPr/>
-        </p:nvSpPr>
-        <p:spPr>
-          <a:xfrm>
-            <a:off x="7360920" y="2279142"/>
-            <a:ext cx="2148840" cy="354330"/>
-          </a:xfrm>
-          <a:prstGeom prst="rect">
-            <a:avLst/>
-          </a:prstGeom>
-          <a:solidFill>
-            <a:srgbClr val="FFFFFF"/>
-          </a:solidFill>
-          <a:ln w="5080">
-            <a:solidFill>
-              <a:srgbClr val="E5E7EB"/>
-            </a:solidFill>
-          </a:ln>
-        </p:spPr>
-        <p:txBody>
-          <a:bodyPr wrap="square" lIns="508" tIns="508" rIns="508" bIns="508" rtlCol="0" anchor="ctr">
-            <a:normAutofit/>
-          </a:bodyPr>
-          <a:lstStyle/>
-          <a:p>
-            <a:pPr marL="0" indent="0">
-              <a:buNone/>
-            </a:pPr>
-            <a:r>
-              <a:rPr lang="en-US" sz="1000" dirty="0">
-                <a:solidFill>
-                  <a:srgbClr val="111827"/>
-                </a:solidFill>
-                <a:latin typeface="Aptos" pitchFamily="34" charset="0"/>
-                <a:ea typeface="Aptos" pitchFamily="34" charset="-122"/>
-                <a:cs typeface="Aptos" pitchFamily="34" charset="-120"/>
-              </a:rPr>
-              <a:t>[fill]</a:t>
-            </a:r>
-            <a:endParaRPr lang="en-US" sz="1000" dirty="0"/>
-          </a:p>
-        </p:txBody>
-      </p:sp>
-      <p:sp>
-        <p:nvSpPr>
-          <p:cNvPr id="30" name="Text 28"/>
-          <p:cNvSpPr/>
-          <p:nvPr/>
-        </p:nvSpPr>
-        <p:spPr>
-          <a:xfrm>
-            <a:off x="9509760" y="2279142"/>
-            <a:ext cx="2194560" cy="354330"/>
-          </a:xfrm>
-          <a:prstGeom prst="rect">
-            <a:avLst/>
-          </a:prstGeom>
-          <a:solidFill>
-            <a:srgbClr val="FFFFFF"/>
-          </a:solidFill>
-          <a:ln w="5080">
-            <a:solidFill>
-              <a:srgbClr val="E5E7EB"/>
-            </a:solidFill>
-          </a:ln>
-        </p:spPr>
-        <p:txBody>
-          <a:bodyPr wrap="square" lIns="508" tIns="508" rIns="508" bIns="508" rtlCol="0" anchor="ctr">
-            <a:normAutofit/>
-          </a:bodyPr>
-          <a:lstStyle/>
-          <a:p>
-            <a:pPr marL="0" indent="0">
-              <a:buNone/>
-            </a:pPr>
-            <a:r>
-              <a:rPr lang="en-US" sz="1000" dirty="0">
-                <a:solidFill>
-                  <a:srgbClr val="111827"/>
-                </a:solidFill>
-                <a:latin typeface="Aptos" pitchFamily="34" charset="0"/>
-                <a:ea typeface="Aptos" pitchFamily="34" charset="-122"/>
-                <a:cs typeface="Aptos" pitchFamily="34" charset="-120"/>
-              </a:rPr>
-              <a:t>Running</a:t>
-            </a:r>
-            <a:endParaRPr lang="en-US" sz="1000" dirty="0"/>
-          </a:p>
-        </p:txBody>
-      </p:sp>
-      <p:sp>
-        <p:nvSpPr>
-          <p:cNvPr id="31" name="Text 29"/>
-          <p:cNvSpPr/>
-          <p:nvPr/>
-        </p:nvSpPr>
-        <p:spPr>
-          <a:xfrm>
-            <a:off x="685800" y="2788920"/>
-            <a:ext cx="10972800" cy="228600"/>
-          </a:xfrm>
-          <a:prstGeom prst="rect">
-            <a:avLst/>
-          </a:prstGeom>
-          <a:noFill/>
-          <a:ln/>
-        </p:spPr>
-        <p:txBody>
-          <a:bodyPr wrap="square" lIns="0" tIns="0" rIns="0" bIns="0" rtlCol="0" anchor="ctr">
-            <a:normAutofit/>
-          </a:bodyPr>
-          <a:lstStyle/>
-          <a:p>
-            <a:pPr marL="0" indent="0">
-              <a:buNone/>
-            </a:pPr>
-            <a:r>
-              <a:rPr lang="en-US" sz="1000" i="1" dirty="0">
-                <a:solidFill>
-                  <a:srgbClr val="4B5563"/>
-                </a:solidFill>
-                <a:latin typeface="Aptos" pitchFamily="34" charset="0"/>
-                <a:ea typeface="Aptos" pitchFamily="34" charset="-122"/>
-                <a:cs typeface="Aptos" pitchFamily="34" charset="-120"/>
-              </a:rPr>
-              <a:t>Partial 541183 snapshot: 19/48 steps, 7 successes. A=4/8, D=2/3, F=0/6, E=1/2. Remaining steps expected to finish overnight.</a:t>
+              <a:t>71% (10/14)</a:t>
             </a:r>
             <a:endParaRPr lang="en-US" sz="1000" dirty="0"/>
           </a:p>
@@ -5622,13 +5199,13 @@
           <p:nvPr>
             <p:extLst>
               <p:ext uri="{D42A27DB-BD31-4B8C-83A1-F6EECF244321}">
-                <p14:modId xmlns:p14="http://schemas.microsoft.com/office/powerpoint/2010/main" val="3656401572"/>
+                <p14:modId xmlns:p14="http://schemas.microsoft.com/office/powerpoint/2010/main" val="1600243692"/>
               </p:ext>
             </p:extLst>
           </p:nvPr>
         </p:nvGraphicFramePr>
         <p:xfrm>
-          <a:off x="795528" y="4762246"/>
+          <a:off x="685800" y="4762246"/>
           <a:ext cx="2832100" cy="1261905"/>
         </p:xfrm>
         <a:graphic>
@@ -5820,7 +5397,7 @@
                         <a:buNone/>
                       </a:pPr>
                       <a:r>
-                        <a:rPr lang="he-IL" sz="900">
+                        <a:rPr lang="he-IL" sz="900" dirty="0">
                           <a:effectLst/>
                         </a:rPr>
                         <a:t>0.247</a:t>
@@ -6278,6 +5855,59 @@
               <a:effectLst/>
               <a:latin typeface="Arial" panose="020B0604020202020204" pitchFamily="34" charset="0"/>
             </a:endParaRPr>
+          </a:p>
+        </p:txBody>
+      </p:sp>
+      <p:sp>
+        <p:nvSpPr>
+          <p:cNvPr id="35" name="Text 20">
+            <a:extLst>
+              <a:ext uri="{FF2B5EF4-FFF2-40B4-BE49-F238E27FC236}">
+                <a16:creationId xmlns:a16="http://schemas.microsoft.com/office/drawing/2014/main" id="{FEF69491-35BC-E471-FB74-2A70E91BCAA1}"/>
+              </a:ext>
+            </a:extLst>
+          </p:cNvPr>
+          <p:cNvSpPr/>
+          <p:nvPr/>
+        </p:nvSpPr>
+        <p:spPr>
+          <a:xfrm>
+            <a:off x="4251960" y="2284595"/>
+            <a:ext cx="2057400" cy="354330"/>
+          </a:xfrm>
+          <a:prstGeom prst="rect">
+            <a:avLst/>
+          </a:prstGeom>
+          <a:solidFill>
+            <a:srgbClr val="FFFFFF"/>
+          </a:solidFill>
+          <a:ln w="5080">
+            <a:solidFill>
+              <a:srgbClr val="E5E7EB"/>
+            </a:solidFill>
+          </a:ln>
+        </p:spPr>
+        <p:txBody>
+          <a:bodyPr wrap="square" lIns="508" tIns="508" rIns="508" bIns="508" rtlCol="0" anchor="ctr">
+            <a:normAutofit/>
+          </a:bodyPr>
+          <a:lstStyle/>
+          <a:p>
+            <a:pPr marL="0" indent="0">
+              <a:buNone/>
+            </a:pPr>
+            <a:r>
+              <a:rPr lang="en-US" sz="1000" dirty="0">
+                <a:solidFill>
+                  <a:srgbClr val="111827"/>
+                </a:solidFill>
+                <a:latin typeface="Aptos" pitchFamily="34" charset="0"/>
+                <a:ea typeface="Aptos" pitchFamily="34" charset="-122"/>
+                <a:cs typeface="Aptos" pitchFamily="34" charset="-120"/>
+              </a:rPr>
+              <a:t>45.5% (20/44)</a:t>
+            </a:r>
+            <a:endParaRPr lang="en-US" sz="1000" dirty="0"/>
           </a:p>
         </p:txBody>
       </p:sp>
